--- a/docs/competition-remio/roadshow-ppt/EduAgent-路演PPT.pptx
+++ b/docs/competition-remio/roadshow-ppt/EduAgent-路演PPT.pptx
@@ -1046,7 +1046,7 @@
           <a:p>
             <a:r>
               <a:rPr lang="en-US" dirty="0"/>
-              <a:t>验收表逐条可测。邀请评委用触发语现场实测，是最有说服力的收口。</a:t>
+              <a:t>验收表逐条可测。底部为 2026-09-09 实跑量化基线：142/142 测试、11/11 质量基线、RAG 内容相关 top-1 100%（24 查询）、18 端点三方一致；复现：uv run pytest / tests/evals/eval_rag_hit_real.py / app.mcp_server --self-test。邀请评委用触发语现场实测收口。</a:t>
             </a:r>
             <a:endParaRPr lang="en-US" dirty="0"/>
           </a:p>
@@ -1838,7 +1838,7 @@
           <a:p>
             <a:r>
               <a:rPr lang="en-US" dirty="0"/>
-              <a:t>强调防幻觉是赛题刚性要求，Wiki 是所有 Agent 的事实边界；aApp 内置计算机网络，另两门经 MCP 提供。</a:t>
+              <a:t>强调防幻觉是赛题刚性要求，Wiki 是所有 Agent 的事实边界；aApp 内置计算机网络，另一门经 MCP 提供。</a:t>
             </a:r>
             <a:endParaRPr lang="en-US" dirty="0"/>
           </a:p>
@@ -8051,40 +8051,229 @@
         </p:nvSpPr>
         <p:spPr>
           <a:xfrm>
-            <a:off x="566928" y="5852160"/>
-            <a:ext cx="11057839" cy="365760"/>
-          </a:xfrm>
-          <a:prstGeom prst="rect">
-            <a:avLst/>
-          </a:prstGeom>
-          <a:noFill/>
+            <a:off x="566928" y="5760720"/>
+            <a:ext cx="2627071" cy="566928"/>
+          </a:xfrm>
+          <a:prstGeom prst="roundRect">
+            <a:avLst>
+              <a:gd name="adj" fmla="val 14516"/>
+            </a:avLst>
+          </a:prstGeom>
+          <a:solidFill>
+            <a:srgbClr val="F4F0E4"/>
+          </a:solidFill>
           <a:ln/>
         </p:spPr>
         <p:txBody>
-          <a:bodyPr wrap="square" rtlCol="0" anchor="ctr"/>
-          <a:lstStyle/>
-          <a:p>
-            <a:pPr algn="l" indent="0" marL="0">
-              <a:buNone/>
-            </a:pPr>
-            <a:r>
-              <a:rPr lang="en-US" sz="1250" b="1" dirty="0">
+          <a:bodyPr wrap="square" lIns="635" tIns="1524" rIns="1270" bIns="635" rtlCol="0" anchor="ctr"/>
+          <a:lstStyle/>
+          <a:p>
+            <a:pPr algn="ctr" indent="0" marL="0">
+              <a:buNone/>
+            </a:pPr>
+            <a:r>
+              <a:rPr lang="en-US" sz="1400" b="1" dirty="0">
                 <a:solidFill>
                   <a:srgbClr val="C96442"/>
                 </a:solidFill>
-                <a:latin typeface="Microsoft YaHei" pitchFamily="34" charset="0"/>
-                <a:ea typeface="Microsoft YaHei" pitchFamily="34" charset="-122"/>
-                <a:cs typeface="Microsoft YaHei" pitchFamily="34" charset="-120"/>
-              </a:rPr>
-              <a:t>aApp 已上架 remio 市场，MCP 可接入任意宿主，均支持现场实测闭环。</a:t>
-            </a:r>
-            <a:endParaRPr lang="en-US" sz="1250" dirty="0"/>
-          </a:p>
-        </p:txBody>
-      </p:sp>
-      <p:sp>
-        <p:nvSpPr>
-          <p:cNvPr id="9" name="Shape 6"/>
+                <a:latin typeface="Consolas" pitchFamily="34" charset="0"/>
+                <a:ea typeface="Consolas" pitchFamily="34" charset="-122"/>
+                <a:cs typeface="Consolas" pitchFamily="34" charset="-120"/>
+              </a:rPr>
+              <a:t>142/142　</a:t>
+            </a:r>
+            <a:pPr algn="ctr" indent="0" marL="0">
+              <a:buNone/>
+            </a:pPr>
+            <a:r>
+              <a:rPr lang="en-US" sz="900" dirty="0">
+                <a:solidFill>
+                  <a:srgbClr val="6E6656"/>
+                </a:solidFill>
+                <a:latin typeface="Microsoft YaHei" pitchFamily="34" charset="0"/>
+                <a:ea typeface="Microsoft YaHei" pitchFamily="34" charset="-122"/>
+                <a:cs typeface="Microsoft YaHei" pitchFamily="34" charset="-120"/>
+              </a:rPr>
+              <a:t>引擎测试通过</a:t>
+            </a:r>
+            <a:endParaRPr lang="en-US" sz="1400" dirty="0"/>
+          </a:p>
+        </p:txBody>
+      </p:sp>
+      <p:sp>
+        <p:nvSpPr>
+          <p:cNvPr id="9" name="Text 6"/>
+          <p:cNvSpPr/>
+          <p:nvPr/>
+        </p:nvSpPr>
+        <p:spPr>
+          <a:xfrm>
+            <a:off x="3376879" y="5760720"/>
+            <a:ext cx="2627071" cy="566928"/>
+          </a:xfrm>
+          <a:prstGeom prst="roundRect">
+            <a:avLst>
+              <a:gd name="adj" fmla="val 14516"/>
+            </a:avLst>
+          </a:prstGeom>
+          <a:solidFill>
+            <a:srgbClr val="F4F0E4"/>
+          </a:solidFill>
+          <a:ln/>
+        </p:spPr>
+        <p:txBody>
+          <a:bodyPr wrap="square" lIns="635" tIns="1524" rIns="1270" bIns="635" rtlCol="0" anchor="ctr"/>
+          <a:lstStyle/>
+          <a:p>
+            <a:pPr algn="ctr" indent="0" marL="0">
+              <a:buNone/>
+            </a:pPr>
+            <a:r>
+              <a:rPr lang="en-US" sz="1400" b="1" dirty="0">
+                <a:solidFill>
+                  <a:srgbClr val="C96442"/>
+                </a:solidFill>
+                <a:latin typeface="Consolas" pitchFamily="34" charset="0"/>
+                <a:ea typeface="Consolas" pitchFamily="34" charset="-122"/>
+                <a:cs typeface="Consolas" pitchFamily="34" charset="-120"/>
+              </a:rPr>
+              <a:t>11/11　</a:t>
+            </a:r>
+            <a:pPr algn="ctr" indent="0" marL="0">
+              <a:buNone/>
+            </a:pPr>
+            <a:r>
+              <a:rPr lang="en-US" sz="900" dirty="0">
+                <a:solidFill>
+                  <a:srgbClr val="6E6656"/>
+                </a:solidFill>
+                <a:latin typeface="Microsoft YaHei" pitchFamily="34" charset="0"/>
+                <a:ea typeface="Microsoft YaHei" pitchFamily="34" charset="-122"/>
+                <a:cs typeface="Microsoft YaHei" pitchFamily="34" charset="-120"/>
+              </a:rPr>
+              <a:t>质量基线通过</a:t>
+            </a:r>
+            <a:endParaRPr lang="en-US" sz="1400" dirty="0"/>
+          </a:p>
+        </p:txBody>
+      </p:sp>
+      <p:sp>
+        <p:nvSpPr>
+          <p:cNvPr id="10" name="Text 7"/>
+          <p:cNvSpPr/>
+          <p:nvPr/>
+        </p:nvSpPr>
+        <p:spPr>
+          <a:xfrm>
+            <a:off x="6186830" y="5760720"/>
+            <a:ext cx="2627071" cy="566928"/>
+          </a:xfrm>
+          <a:prstGeom prst="roundRect">
+            <a:avLst>
+              <a:gd name="adj" fmla="val 14516"/>
+            </a:avLst>
+          </a:prstGeom>
+          <a:solidFill>
+            <a:srgbClr val="F4F0E4"/>
+          </a:solidFill>
+          <a:ln/>
+        </p:spPr>
+        <p:txBody>
+          <a:bodyPr wrap="square" lIns="635" tIns="1524" rIns="1270" bIns="635" rtlCol="0" anchor="ctr"/>
+          <a:lstStyle/>
+          <a:p>
+            <a:pPr algn="ctr" indent="0" marL="0">
+              <a:buNone/>
+            </a:pPr>
+            <a:r>
+              <a:rPr lang="en-US" sz="1400" b="1" dirty="0">
+                <a:solidFill>
+                  <a:srgbClr val="C96442"/>
+                </a:solidFill>
+                <a:latin typeface="Consolas" pitchFamily="34" charset="0"/>
+                <a:ea typeface="Consolas" pitchFamily="34" charset="-122"/>
+                <a:cs typeface="Consolas" pitchFamily="34" charset="-120"/>
+              </a:rPr>
+              <a:t>100%　</a:t>
+            </a:r>
+            <a:pPr algn="ctr" indent="0" marL="0">
+              <a:buNone/>
+            </a:pPr>
+            <a:r>
+              <a:rPr lang="en-US" sz="900" dirty="0">
+                <a:solidFill>
+                  <a:srgbClr val="6E6656"/>
+                </a:solidFill>
+                <a:latin typeface="Microsoft YaHei" pitchFamily="34" charset="0"/>
+                <a:ea typeface="Microsoft YaHei" pitchFamily="34" charset="-122"/>
+                <a:cs typeface="Microsoft YaHei" pitchFamily="34" charset="-120"/>
+              </a:rPr>
+              <a:t>RAG top-1（24 条真实查询）</a:t>
+            </a:r>
+            <a:endParaRPr lang="en-US" sz="1400" dirty="0"/>
+          </a:p>
+        </p:txBody>
+      </p:sp>
+      <p:sp>
+        <p:nvSpPr>
+          <p:cNvPr id="11" name="Text 8"/>
+          <p:cNvSpPr/>
+          <p:nvPr/>
+        </p:nvSpPr>
+        <p:spPr>
+          <a:xfrm>
+            <a:off x="8996782" y="5760720"/>
+            <a:ext cx="2627071" cy="566928"/>
+          </a:xfrm>
+          <a:prstGeom prst="roundRect">
+            <a:avLst>
+              <a:gd name="adj" fmla="val 14516"/>
+            </a:avLst>
+          </a:prstGeom>
+          <a:solidFill>
+            <a:srgbClr val="F4F0E4"/>
+          </a:solidFill>
+          <a:ln/>
+        </p:spPr>
+        <p:txBody>
+          <a:bodyPr wrap="square" lIns="635" tIns="1524" rIns="1270" bIns="635" rtlCol="0" anchor="ctr"/>
+          <a:lstStyle/>
+          <a:p>
+            <a:pPr algn="ctr" indent="0" marL="0">
+              <a:buNone/>
+            </a:pPr>
+            <a:r>
+              <a:rPr lang="en-US" sz="1400" b="1" dirty="0">
+                <a:solidFill>
+                  <a:srgbClr val="C96442"/>
+                </a:solidFill>
+                <a:latin typeface="Consolas" pitchFamily="34" charset="0"/>
+                <a:ea typeface="Consolas" pitchFamily="34" charset="-122"/>
+                <a:cs typeface="Consolas" pitchFamily="34" charset="-120"/>
+              </a:rPr>
+              <a:t>18/18　</a:t>
+            </a:r>
+            <a:pPr algn="ctr" indent="0" marL="0">
+              <a:buNone/>
+            </a:pPr>
+            <a:r>
+              <a:rPr lang="en-US" sz="900" dirty="0">
+                <a:solidFill>
+                  <a:srgbClr val="6E6656"/>
+                </a:solidFill>
+                <a:latin typeface="Microsoft YaHei" pitchFamily="34" charset="0"/>
+                <a:ea typeface="Microsoft YaHei" pitchFamily="34" charset="-122"/>
+                <a:cs typeface="Microsoft YaHei" pitchFamily="34" charset="-120"/>
+              </a:rPr>
+              <a:t>端点三方一致</a:t>
+            </a:r>
+            <a:endParaRPr lang="en-US" sz="1400" dirty="0"/>
+          </a:p>
+        </p:txBody>
+      </p:sp>
+      <p:sp>
+        <p:nvSpPr>
+          <p:cNvPr id="12" name="Shape 9"/>
           <p:cNvSpPr/>
           <p:nvPr/>
         </p:nvSpPr>
@@ -8107,7 +8296,7 @@
       </p:sp>
       <p:sp>
         <p:nvSpPr>
-          <p:cNvPr id="10" name="Text 7"/>
+          <p:cNvPr id="13" name="Text 10"/>
           <p:cNvSpPr/>
           <p:nvPr/>
         </p:nvSpPr>
@@ -8146,7 +8335,7 @@
       </p:sp>
       <p:sp>
         <p:nvSpPr>
-          <p:cNvPr id="11" name="Text 8"/>
+          <p:cNvPr id="14" name="Text 11"/>
           <p:cNvSpPr/>
           <p:nvPr/>
         </p:nvSpPr>
@@ -17275,7 +17464,7 @@
                 <a:ea typeface="Microsoft YaHei" pitchFamily="34" charset="-122"/>
                 <a:cs typeface="Microsoft YaHei" pitchFamily="34" charset="-120"/>
               </a:rPr>
-              <a:t>LLM Wiki：所有 Agent 共享的知识中枢，内置三门完整课程</a:t>
+              <a:t>LLM Wiki：所有 Agent 共享的知识中枢，内置两门完整课程</a:t>
             </a:r>
             <a:endParaRPr lang="en-US" sz="2400" dirty="0"/>
           </a:p>
@@ -17785,7 +17974,7 @@
                           <a:ea typeface="Microsoft YaHei" pitchFamily="34" charset="-122"/>
                           <a:cs typeface="Microsoft YaHei" pitchFamily="34" charset="-120"/>
                         </a:rPr>
-                        <a:t>人工智能导论（AI101）</a:t>
+                        <a:t>计算机网络（CN101）</a:t>
                       </a:r>
                       <a:endParaRPr lang="en-US" sz="1050" dirty="0">
                         <a:latin typeface="Microsoft YaHei" charset="0"/>
@@ -17853,7 +18042,7 @@
                           <a:ea typeface="Microsoft YaHei" pitchFamily="34" charset="-122"/>
                           <a:cs typeface="Microsoft YaHei" pitchFamily="34" charset="-120"/>
                         </a:rPr>
-                        <a:t>13 章，默认课程</a:t>
+                        <a:t>13 章：总纲 + 12 讲 + 附录，默认课程</a:t>
                       </a:r>
                       <a:endParaRPr lang="en-US" sz="1050" dirty="0">
                         <a:latin typeface="Microsoft YaHei" charset="0"/>
@@ -17901,212 +18090,6 @@
                     </a:lnB>
                     <a:solidFill>
                       <a:srgbClr val="FFFFFF"/>
-                    </a:solidFill>
-                  </a:tcPr>
-                </a:tc>
-                <a:tc>
-                  <a:txBody>
-                    <a:bodyPr/>
-                    <a:lstStyle/>
-                    <a:p>
-                      <a:pPr indent="0" marL="0">
-                        <a:buNone/>
-                      </a:pPr>
-                      <a:r>
-                        <a:rPr lang="en-US" sz="1000" dirty="0">
-                          <a:solidFill>
-                            <a:srgbClr val="2F5D5A"/>
-                          </a:solidFill>
-                          <a:latin typeface="Microsoft YaHei" pitchFamily="34" charset="0"/>
-                          <a:ea typeface="Microsoft YaHei" pitchFamily="34" charset="-122"/>
-                          <a:cs typeface="Microsoft YaHei" pitchFamily="34" charset="-120"/>
-                        </a:rPr>
-                        <a:t>MCP 工具</a:t>
-                      </a:r>
-                      <a:endParaRPr lang="en-US" sz="1000" dirty="0">
-                        <a:latin typeface="Microsoft YaHei" charset="0"/>
-                        <a:ea typeface="Microsoft YaHei" charset="0"/>
-                        <a:cs typeface="Microsoft YaHei" charset="0"/>
-                      </a:endParaRPr>
-                    </a:p>
-                  </a:txBody>
-                  <a:tcPr marL="101600" marR="101600" marT="25400" marB="25400" anchor="ctr">
-                    <a:lnL w="9525" cap="flat" cmpd="sng" algn="ctr">
-                      <a:solidFill>
-                        <a:srgbClr val="DDD6C7"/>
-                      </a:solidFill>
-                      <a:prstDash val="solid"/>
-                      <a:round/>
-                      <a:headEnd type="none" w="med" len="med"/>
-                      <a:tailEnd type="none" w="med" len="med"/>
-                    </a:lnL>
-                    <a:lnR w="9525" cap="flat" cmpd="sng" algn="ctr">
-                      <a:solidFill>
-                        <a:srgbClr val="DDD6C7"/>
-                      </a:solidFill>
-                      <a:prstDash val="solid"/>
-                      <a:round/>
-                      <a:headEnd type="none" w="med" len="med"/>
-                      <a:tailEnd type="none" w="med" len="med"/>
-                    </a:lnR>
-                    <a:lnT w="9525" cap="flat" cmpd="sng" algn="ctr">
-                      <a:solidFill>
-                        <a:srgbClr val="DDD6C7"/>
-                      </a:solidFill>
-                      <a:prstDash val="solid"/>
-                      <a:round/>
-                      <a:headEnd type="none" w="med" len="med"/>
-                      <a:tailEnd type="none" w="med" len="med"/>
-                    </a:lnT>
-                    <a:lnB w="9525" cap="flat" cmpd="sng" algn="ctr">
-                      <a:solidFill>
-                        <a:srgbClr val="DDD6C7"/>
-                      </a:solidFill>
-                      <a:prstDash val="solid"/>
-                      <a:round/>
-                      <a:headEnd type="none" w="med" len="med"/>
-                      <a:tailEnd type="none" w="med" len="med"/>
-                    </a:lnB>
-                    <a:solidFill>
-                      <a:srgbClr val="FFFFFF"/>
-                    </a:solidFill>
-                  </a:tcPr>
-                </a:tc>
-              </a:tr>
-              <a:tr h="420624">
-                <a:tc>
-                  <a:txBody>
-                    <a:bodyPr/>
-                    <a:lstStyle/>
-                    <a:p>
-                      <a:pPr indent="0" marL="0">
-                        <a:buNone/>
-                      </a:pPr>
-                      <a:r>
-                        <a:rPr lang="en-US" sz="1050" b="1" dirty="0">
-                          <a:solidFill>
-                            <a:srgbClr val="26211C"/>
-                          </a:solidFill>
-                          <a:latin typeface="Microsoft YaHei" pitchFamily="34" charset="0"/>
-                          <a:ea typeface="Microsoft YaHei" pitchFamily="34" charset="-122"/>
-                          <a:cs typeface="Microsoft YaHei" pitchFamily="34" charset="-120"/>
-                        </a:rPr>
-                        <a:t>计算机网络</a:t>
-                      </a:r>
-                      <a:endParaRPr lang="en-US" sz="1050" dirty="0">
-                        <a:latin typeface="Microsoft YaHei" charset="0"/>
-                        <a:ea typeface="Microsoft YaHei" charset="0"/>
-                        <a:cs typeface="Microsoft YaHei" charset="0"/>
-                      </a:endParaRPr>
-                    </a:p>
-                  </a:txBody>
-                  <a:tcPr marL="101600" marR="101600" marT="25400" marB="25400" anchor="ctr">
-                    <a:lnL w="9525" cap="flat" cmpd="sng" algn="ctr">
-                      <a:solidFill>
-                        <a:srgbClr val="DDD6C7"/>
-                      </a:solidFill>
-                      <a:prstDash val="solid"/>
-                      <a:round/>
-                      <a:headEnd type="none" w="med" len="med"/>
-                      <a:tailEnd type="none" w="med" len="med"/>
-                    </a:lnL>
-                    <a:lnR w="9525" cap="flat" cmpd="sng" algn="ctr">
-                      <a:solidFill>
-                        <a:srgbClr val="DDD6C7"/>
-                      </a:solidFill>
-                      <a:prstDash val="solid"/>
-                      <a:round/>
-                      <a:headEnd type="none" w="med" len="med"/>
-                      <a:tailEnd type="none" w="med" len="med"/>
-                    </a:lnR>
-                    <a:lnT w="9525" cap="flat" cmpd="sng" algn="ctr">
-                      <a:solidFill>
-                        <a:srgbClr val="DDD6C7"/>
-                      </a:solidFill>
-                      <a:prstDash val="solid"/>
-                      <a:round/>
-                      <a:headEnd type="none" w="med" len="med"/>
-                      <a:tailEnd type="none" w="med" len="med"/>
-                    </a:lnT>
-                    <a:lnB w="9525" cap="flat" cmpd="sng" algn="ctr">
-                      <a:solidFill>
-                        <a:srgbClr val="DDD6C7"/>
-                      </a:solidFill>
-                      <a:prstDash val="solid"/>
-                      <a:round/>
-                      <a:headEnd type="none" w="med" len="med"/>
-                      <a:tailEnd type="none" w="med" len="med"/>
-                    </a:lnB>
-                    <a:solidFill>
-                      <a:srgbClr val="F4F0E4"/>
-                    </a:solidFill>
-                  </a:tcPr>
-                </a:tc>
-                <a:tc>
-                  <a:txBody>
-                    <a:bodyPr/>
-                    <a:lstStyle/>
-                    <a:p>
-                      <a:pPr indent="0" marL="0">
-                        <a:buNone/>
-                      </a:pPr>
-                      <a:r>
-                        <a:rPr lang="en-US" sz="1050" dirty="0">
-                          <a:solidFill>
-                            <a:srgbClr val="26211C"/>
-                          </a:solidFill>
-                          <a:latin typeface="Microsoft YaHei" pitchFamily="34" charset="0"/>
-                          <a:ea typeface="Microsoft YaHei" pitchFamily="34" charset="-122"/>
-                          <a:cs typeface="Microsoft YaHei" pitchFamily="34" charset="-120"/>
-                        </a:rPr>
-                        <a:t>8 章讲解 + 总纲 / 习题 / 代码案例 / 实验 / 媒体资源，约 160 篇</a:t>
-                      </a:r>
-                      <a:endParaRPr lang="en-US" sz="1050" dirty="0">
-                        <a:latin typeface="Microsoft YaHei" charset="0"/>
-                        <a:ea typeface="Microsoft YaHei" charset="0"/>
-                        <a:cs typeface="Microsoft YaHei" charset="0"/>
-                      </a:endParaRPr>
-                    </a:p>
-                  </a:txBody>
-                  <a:tcPr marL="101600" marR="101600" marT="25400" marB="25400" anchor="ctr">
-                    <a:lnL w="9525" cap="flat" cmpd="sng" algn="ctr">
-                      <a:solidFill>
-                        <a:srgbClr val="DDD6C7"/>
-                      </a:solidFill>
-                      <a:prstDash val="solid"/>
-                      <a:round/>
-                      <a:headEnd type="none" w="med" len="med"/>
-                      <a:tailEnd type="none" w="med" len="med"/>
-                    </a:lnL>
-                    <a:lnR w="9525" cap="flat" cmpd="sng" algn="ctr">
-                      <a:solidFill>
-                        <a:srgbClr val="DDD6C7"/>
-                      </a:solidFill>
-                      <a:prstDash val="solid"/>
-                      <a:round/>
-                      <a:headEnd type="none" w="med" len="med"/>
-                      <a:tailEnd type="none" w="med" len="med"/>
-                    </a:lnR>
-                    <a:lnT w="9525" cap="flat" cmpd="sng" algn="ctr">
-                      <a:solidFill>
-                        <a:srgbClr val="DDD6C7"/>
-                      </a:solidFill>
-                      <a:prstDash val="solid"/>
-                      <a:round/>
-                      <a:headEnd type="none" w="med" len="med"/>
-                      <a:tailEnd type="none" w="med" len="med"/>
-                    </a:lnT>
-                    <a:lnB w="9525" cap="flat" cmpd="sng" algn="ctr">
-                      <a:solidFill>
-                        <a:srgbClr val="DDD6C7"/>
-                      </a:solidFill>
-                      <a:prstDash val="solid"/>
-                      <a:round/>
-                      <a:headEnd type="none" w="med" len="med"/>
-                      <a:tailEnd type="none" w="med" len="med"/>
-                    </a:lnB>
-                    <a:solidFill>
-                      <a:srgbClr val="F4F0E4"/>
                     </a:solidFill>
                   </a:tcPr>
                 </a:tc>
@@ -18174,7 +18157,7 @@
                       <a:tailEnd type="none" w="med" len="med"/>
                     </a:lnB>
                     <a:solidFill>
-                      <a:srgbClr val="F4F0E4"/>
+                      <a:srgbClr val="FFFFFF"/>
                     </a:solidFill>
                   </a:tcPr>
                 </a:tc>
@@ -18244,7 +18227,7 @@
                       <a:tailEnd type="none" w="med" len="med"/>
                     </a:lnB>
                     <a:solidFill>
-                      <a:srgbClr val="FFFFFF"/>
+                      <a:srgbClr val="F4F0E4"/>
                     </a:solidFill>
                   </a:tcPr>
                 </a:tc>
@@ -18312,7 +18295,7 @@
                       <a:tailEnd type="none" w="med" len="med"/>
                     </a:lnB>
                     <a:solidFill>
-                      <a:srgbClr val="FFFFFF"/>
+                      <a:srgbClr val="F4F0E4"/>
                     </a:solidFill>
                   </a:tcPr>
                 </a:tc>
@@ -18333,7 +18316,7 @@
                           <a:ea typeface="Microsoft YaHei" pitchFamily="34" charset="-122"/>
                           <a:cs typeface="Microsoft YaHei" pitchFamily="34" charset="-120"/>
                         </a:rPr>
-                        <a:t>MCP 工具</a:t>
+                        <a:t>MCP 工具集</a:t>
                       </a:r>
                       <a:endParaRPr lang="en-US" sz="1000" dirty="0">
                         <a:latin typeface="Microsoft YaHei" charset="0"/>
@@ -18380,7 +18363,7 @@
                       <a:tailEnd type="none" w="med" len="med"/>
                     </a:lnB>
                     <a:solidFill>
-                      <a:srgbClr val="FFFFFF"/>
+                      <a:srgbClr val="F4F0E4"/>
                     </a:solidFill>
                   </a:tcPr>
                 </a:tc>
